--- a/Bikin-Website/M05-Tambah-Filter-Order-via-WhatsApp/BW-M05-Tambah-Filter-Order-via-WhatsApp.pptx
+++ b/Bikin-Website/M05-Tambah-Filter-Order-via-WhatsApp/BW-M05-Tambah-Filter-Order-via-WhatsApp.pptx
@@ -1797,69 +1797,64 @@
       </p:sp>
       <p:sp>
         <p:nvSpPr>
-          <p:cNvPr id="9" name="Shape 7"/>
+          <p:cNvPr id="9" name="Text 7"/>
+          <p:cNvSpPr txBox="1"/>
+          <p:nvPr/>
+        </p:nvSpPr>
+        <p:spPr>
+          <a:xfrm>
+            <a:off x="502920" y="3657600"/>
+            <a:ext cx="11183112" cy="274320"/>
+          </a:xfrm>
+          <a:prstGeom prst="rect">
+            <a:avLst/>
+          </a:prstGeom>
+          <a:noFill/>
+          <a:ln/>
+        </p:spPr>
+        <p:txBody>
+          <a:bodyPr wrap="square" lIns="0" tIns="0" rIns="0" bIns="0" rtlCol="0" anchor="ctr"/>
+          <a:lstStyle/>
+          <a:p>
+            <a:pPr indent="0" marL="0">
+              <a:buNone/>
+            </a:pPr>
+            <a:r>
+              <a:rPr lang="en-US" sz="1250" b="1" spc="40" kern="0" dirty="0">
+                <a:solidFill>
+                  <a:srgbClr val="4B36C7"/>
+                </a:solidFill>
+                <a:latin typeface="Helvetica" pitchFamily="34" charset="0"/>
+                <a:ea typeface="Helvetica" pitchFamily="34" charset="-122"/>
+                <a:cs typeface="Helvetica" pitchFamily="34" charset="-120"/>
+              </a:rPr>
+              <a:t>CONTOH PROMPT FILTER KATEGORI</a:t>
+            </a:r>
+            <a:endParaRPr lang="en-US" sz="1250" dirty="0"/>
+          </a:p>
+        </p:txBody>
+      </p:sp>
+      <p:sp>
+        <p:nvSpPr>
+          <p:cNvPr id="10" name="Shape 8"/>
           <p:cNvSpPr/>
           <p:nvPr/>
         </p:nvSpPr>
         <p:spPr>
           <a:xfrm>
-            <a:off x="502920" y="3657600"/>
-            <a:ext cx="11183112" cy="1078357"/>
+            <a:off x="502920" y="3968496"/>
+            <a:ext cx="11183112" cy="815086"/>
           </a:xfrm>
           <a:prstGeom prst="roundRect">
             <a:avLst>
-              <a:gd name="adj" fmla="val 8480"/>
+              <a:gd name="adj" fmla="val 8975"/>
             </a:avLst>
           </a:prstGeom>
           <a:solidFill>
-            <a:srgbClr val="F3F0FF"/>
-          </a:solidFill>
-          <a:ln w="12700">
-            <a:solidFill>
-              <a:srgbClr val="DCD3FB"/>
-            </a:solidFill>
-            <a:prstDash val="solid"/>
-          </a:ln>
-        </p:spPr>
-      </p:sp>
-      <p:sp>
-        <p:nvSpPr>
-          <p:cNvPr id="10" name="Text 8"/>
-          <p:cNvSpPr txBox="1"/>
-          <p:nvPr/>
-        </p:nvSpPr>
-        <p:spPr>
-          <a:xfrm>
-            <a:off x="704088" y="3822192"/>
-            <a:ext cx="10780776" cy="256032"/>
-          </a:xfrm>
-          <a:prstGeom prst="rect">
-            <a:avLst/>
-          </a:prstGeom>
-          <a:noFill/>
-          <a:ln/>
-        </p:spPr>
-        <p:txBody>
-          <a:bodyPr wrap="square" lIns="0" tIns="0" rIns="0" bIns="0" rtlCol="0" anchor="ctr"/>
-          <a:lstStyle/>
-          <a:p>
-            <a:pPr indent="0" marL="0">
-              <a:buNone/>
-            </a:pPr>
-            <a:r>
-              <a:rPr lang="en-US" sz="1150" b="1" spc="30" kern="0" dirty="0">
-                <a:solidFill>
-                  <a:srgbClr val="4B36C7"/>
-                </a:solidFill>
-                <a:latin typeface="Helvetica" pitchFamily="34" charset="0"/>
-                <a:ea typeface="Helvetica" pitchFamily="34" charset="-122"/>
-                <a:cs typeface="Helvetica" pitchFamily="34" charset="-120"/>
-              </a:rPr>
-              <a:t>◆ CONTOH PROMPT FILTER KATEGORI</a:t>
-            </a:r>
-            <a:endParaRPr lang="en-US" sz="1150" dirty="0"/>
-          </a:p>
-        </p:txBody>
+            <a:srgbClr val="0D1321"/>
+          </a:solidFill>
+          <a:ln/>
+        </p:spPr>
       </p:sp>
       <p:sp>
         <p:nvSpPr>
@@ -1869,8 +1864,8 @@
         </p:nvSpPr>
         <p:spPr>
           <a:xfrm>
-            <a:off x="704088" y="4169664"/>
-            <a:ext cx="10780776" cy="365125"/>
+            <a:off x="731520" y="4169664"/>
+            <a:ext cx="10725912" cy="412750"/>
           </a:xfrm>
           <a:prstGeom prst="rect">
             <a:avLst/>
@@ -1884,22 +1879,22 @@
           <a:p>
             <a:pPr indent="0" marL="0">
               <a:lnSpc>
-                <a:spcPct val="125000"/>
+                <a:spcPct val="130000"/>
               </a:lnSpc>
               <a:buNone/>
             </a:pPr>
             <a:r>
-              <a:rPr lang="en-US" sz="1150" dirty="0">
-                <a:solidFill>
-                  <a:srgbClr val="23283A"/>
-                </a:solidFill>
-                <a:latin typeface="Helvetica" pitchFamily="34" charset="0"/>
-                <a:ea typeface="Helvetica" pitchFamily="34" charset="-122"/>
-                <a:cs typeface="Helvetica" pitchFamily="34" charset="-120"/>
-              </a:rPr>
-              <a:t>“Tambahkan fungsi filter: waktu tab kategori di-klik, tampilkan hanya produk dari kategori itu, sembunyikan yang lain. Tab ‘Semua’ untuk menampilkan semua produk lagi.”</a:t>
-            </a:r>
-            <a:endParaRPr lang="en-US" sz="1150" dirty="0"/>
+              <a:rPr lang="en-US" sz="1250" i="1" dirty="0">
+                <a:solidFill>
+                  <a:srgbClr val="FFFFFF"/>
+                </a:solidFill>
+                <a:latin typeface="Helvetica" pitchFamily="34" charset="0"/>
+                <a:ea typeface="Helvetica" pitchFamily="34" charset="-122"/>
+                <a:cs typeface="Helvetica" pitchFamily="34" charset="-120"/>
+              </a:rPr>
+              <a:t>Tambahkan fungsi filter: waktu tab kategori di-klik, tampilkan hanya produk dari kategori itu, sembunyikan yang lain. Tab "Semua" untuk menampilkan semua produk lagi.</a:t>
+            </a:r>
+            <a:endParaRPr lang="en-US" sz="1250" dirty="0"/>
           </a:p>
         </p:txBody>
       </p:sp>
@@ -2150,13 +2145,116 @@
       </p:sp>
       <p:sp>
         <p:nvSpPr>
-          <p:cNvPr id="8" name="Shape 6"/>
+          <p:cNvPr id="8" name="Text 6"/>
+          <p:cNvSpPr txBox="1"/>
+          <p:nvPr/>
+        </p:nvSpPr>
+        <p:spPr>
+          <a:xfrm>
+            <a:off x="502920" y="2743200"/>
+            <a:ext cx="11183112" cy="274320"/>
+          </a:xfrm>
+          <a:prstGeom prst="rect">
+            <a:avLst/>
+          </a:prstGeom>
+          <a:noFill/>
+          <a:ln/>
+        </p:spPr>
+        <p:txBody>
+          <a:bodyPr wrap="square" lIns="0" tIns="0" rIns="0" bIns="0" rtlCol="0" anchor="ctr"/>
+          <a:lstStyle/>
+          <a:p>
+            <a:pPr indent="0" marL="0">
+              <a:buNone/>
+            </a:pPr>
+            <a:r>
+              <a:rPr lang="en-US" sz="1250" b="1" spc="40" kern="0" dirty="0">
+                <a:solidFill>
+                  <a:srgbClr val="4B36C7"/>
+                </a:solidFill>
+                <a:latin typeface="Helvetica" pitchFamily="34" charset="0"/>
+                <a:ea typeface="Helvetica" pitchFamily="34" charset="-122"/>
+                <a:cs typeface="Helvetica" pitchFamily="34" charset="-120"/>
+              </a:rPr>
+              <a:t>CONTOH PROMPT ORDER VIA WHATSAPP</a:t>
+            </a:r>
+            <a:endParaRPr lang="en-US" sz="1250" dirty="0"/>
+          </a:p>
+        </p:txBody>
+      </p:sp>
+      <p:sp>
+        <p:nvSpPr>
+          <p:cNvPr id="9" name="Shape 7"/>
           <p:cNvSpPr/>
           <p:nvPr/>
         </p:nvSpPr>
         <p:spPr>
           <a:xfrm>
-            <a:off x="502920" y="2743200"/>
+            <a:off x="502920" y="3054096"/>
+            <a:ext cx="11183112" cy="815086"/>
+          </a:xfrm>
+          <a:prstGeom prst="roundRect">
+            <a:avLst>
+              <a:gd name="adj" fmla="val 8975"/>
+            </a:avLst>
+          </a:prstGeom>
+          <a:solidFill>
+            <a:srgbClr val="0D1321"/>
+          </a:solidFill>
+          <a:ln/>
+        </p:spPr>
+      </p:sp>
+      <p:sp>
+        <p:nvSpPr>
+          <p:cNvPr id="10" name="Text 8"/>
+          <p:cNvSpPr txBox="1"/>
+          <p:nvPr/>
+        </p:nvSpPr>
+        <p:spPr>
+          <a:xfrm>
+            <a:off x="731520" y="3255264"/>
+            <a:ext cx="10725912" cy="412750"/>
+          </a:xfrm>
+          <a:prstGeom prst="rect">
+            <a:avLst/>
+          </a:prstGeom>
+          <a:noFill/>
+          <a:ln/>
+        </p:spPr>
+        <p:txBody>
+          <a:bodyPr wrap="square" lIns="0" tIns="0" rIns="0" bIns="0" rtlCol="0" anchor="ctr"/>
+          <a:lstStyle/>
+          <a:p>
+            <a:pPr indent="0" marL="0">
+              <a:lnSpc>
+                <a:spcPct val="130000"/>
+              </a:lnSpc>
+              <a:buNone/>
+            </a:pPr>
+            <a:r>
+              <a:rPr lang="en-US" sz="1250" i="1" dirty="0">
+                <a:solidFill>
+                  <a:srgbClr val="FFFFFF"/>
+                </a:solidFill>
+                <a:latin typeface="Helvetica" pitchFamily="34" charset="0"/>
+                <a:ea typeface="Helvetica" pitchFamily="34" charset="-122"/>
+                <a:cs typeface="Helvetica" pitchFamily="34" charset="-120"/>
+              </a:rPr>
+              <a:t>Tambahkan tombol "Order via WhatsApp" di setiap kartu produk. Nomor WhatsApp saya [nomor kamu, format 62xxx]. Waktu diklik, buka WhatsApp dengan draft pesan yang sudah otomatis berisi nama produk yang dipesan.</a:t>
+            </a:r>
+            <a:endParaRPr lang="en-US" sz="1250" dirty="0"/>
+          </a:p>
+        </p:txBody>
+      </p:sp>
+      <p:sp>
+        <p:nvSpPr>
+          <p:cNvPr id="11" name="Shape 9"/>
+          <p:cNvSpPr/>
+          <p:nvPr/>
+        </p:nvSpPr>
+        <p:spPr>
+          <a:xfrm>
+            <a:off x="502920" y="4097782"/>
             <a:ext cx="11183112" cy="1078357"/>
           </a:xfrm>
           <a:prstGeom prst="roundRect">
@@ -2177,121 +2275,13 @@
       </p:sp>
       <p:sp>
         <p:nvSpPr>
-          <p:cNvPr id="9" name="Text 7"/>
-          <p:cNvSpPr txBox="1"/>
-          <p:nvPr/>
-        </p:nvSpPr>
-        <p:spPr>
-          <a:xfrm>
-            <a:off x="704088" y="2907792"/>
-            <a:ext cx="10780776" cy="256032"/>
-          </a:xfrm>
-          <a:prstGeom prst="rect">
-            <a:avLst/>
-          </a:prstGeom>
-          <a:noFill/>
-          <a:ln/>
-        </p:spPr>
-        <p:txBody>
-          <a:bodyPr wrap="square" lIns="0" tIns="0" rIns="0" bIns="0" rtlCol="0" anchor="ctr"/>
-          <a:lstStyle/>
-          <a:p>
-            <a:pPr indent="0" marL="0">
-              <a:buNone/>
-            </a:pPr>
-            <a:r>
-              <a:rPr lang="en-US" sz="1150" b="1" spc="30" kern="0" dirty="0">
-                <a:solidFill>
-                  <a:srgbClr val="4B36C7"/>
-                </a:solidFill>
-                <a:latin typeface="Helvetica" pitchFamily="34" charset="0"/>
-                <a:ea typeface="Helvetica" pitchFamily="34" charset="-122"/>
-                <a:cs typeface="Helvetica" pitchFamily="34" charset="-120"/>
-              </a:rPr>
-              <a:t>◆ CONTOH PROMPT ORDER VIA WHATSAPP</a:t>
-            </a:r>
-            <a:endParaRPr lang="en-US" sz="1150" dirty="0"/>
-          </a:p>
-        </p:txBody>
-      </p:sp>
-      <p:sp>
-        <p:nvSpPr>
-          <p:cNvPr id="10" name="Text 8"/>
-          <p:cNvSpPr txBox="1"/>
-          <p:nvPr/>
-        </p:nvSpPr>
-        <p:spPr>
-          <a:xfrm>
-            <a:off x="704088" y="3255264"/>
-            <a:ext cx="10780776" cy="365125"/>
-          </a:xfrm>
-          <a:prstGeom prst="rect">
-            <a:avLst/>
-          </a:prstGeom>
-          <a:noFill/>
-          <a:ln/>
-        </p:spPr>
-        <p:txBody>
-          <a:bodyPr wrap="square" lIns="0" tIns="0" rIns="0" bIns="0" rtlCol="0" anchor="ctr"/>
-          <a:lstStyle/>
-          <a:p>
-            <a:pPr indent="0" marL="0">
-              <a:lnSpc>
-                <a:spcPct val="125000"/>
-              </a:lnSpc>
-              <a:buNone/>
-            </a:pPr>
-            <a:r>
-              <a:rPr lang="en-US" sz="1150" dirty="0">
-                <a:solidFill>
-                  <a:srgbClr val="23283A"/>
-                </a:solidFill>
-                <a:latin typeface="Helvetica" pitchFamily="34" charset="0"/>
-                <a:ea typeface="Helvetica" pitchFamily="34" charset="-122"/>
-                <a:cs typeface="Helvetica" pitchFamily="34" charset="-120"/>
-              </a:rPr>
-              <a:t>“Tambahkan tombol ‘Order via WhatsApp’ di setiap kartu produk. Nomor WhatsApp saya [nomor kamu]. Waktu diklik, buka WhatsApp dengan draft pesan yang sudah otomatis berisi nama produk yang dipesan.”</a:t>
-            </a:r>
-            <a:endParaRPr lang="en-US" sz="1150" dirty="0"/>
-          </a:p>
-        </p:txBody>
-      </p:sp>
-      <p:sp>
-        <p:nvSpPr>
-          <p:cNvPr id="11" name="Shape 9"/>
-          <p:cNvSpPr/>
-          <p:nvPr/>
-        </p:nvSpPr>
-        <p:spPr>
-          <a:xfrm>
-            <a:off x="502920" y="4050157"/>
-            <a:ext cx="11183112" cy="1078357"/>
-          </a:xfrm>
-          <a:prstGeom prst="roundRect">
-            <a:avLst>
-              <a:gd name="adj" fmla="val 8480"/>
-            </a:avLst>
-          </a:prstGeom>
-          <a:solidFill>
-            <a:srgbClr val="F3F0FF"/>
-          </a:solidFill>
-          <a:ln w="12700">
-            <a:solidFill>
-              <a:srgbClr val="DCD3FB"/>
-            </a:solidFill>
-            <a:prstDash val="solid"/>
-          </a:ln>
-        </p:spPr>
-      </p:sp>
-      <p:sp>
-        <p:nvSpPr>
           <p:cNvPr id="12" name="Text 10"/>
           <p:cNvSpPr txBox="1"/>
           <p:nvPr/>
         </p:nvSpPr>
         <p:spPr>
           <a:xfrm>
-            <a:off x="704088" y="4214749"/>
+            <a:off x="704088" y="4262374"/>
             <a:ext cx="10780776" cy="256032"/>
           </a:xfrm>
           <a:prstGeom prst="rect">
@@ -2330,7 +2320,7 @@
         </p:nvSpPr>
         <p:spPr>
           <a:xfrm>
-            <a:off x="704088" y="4562221"/>
+            <a:off x="704088" y="4609846"/>
             <a:ext cx="10780776" cy="365125"/>
           </a:xfrm>
           <a:prstGeom prst="rect">
